--- a/apps/resources/bundled_files/2-klass-kobeytuu-2-3-4-sabak.pptx
+++ b/apps/resources/bundled_files/2-klass-kobeytuu-2-3-4-sabak.pptx
@@ -5196,7 +5196,7 @@
                 </a:solidFill>
                 <a:latin typeface="PT Sans"/>
               </a:rPr>
-              <a:t>2-класс · Математика</a:t>
+              <a:t/>
             </a:r>
           </a:p>
         </p:txBody>
@@ -5688,7 +5688,7 @@
                 </a:solidFill>
                 <a:latin typeface="PT Sans"/>
               </a:rPr>
-              <a:t>2-класс ›</a:t>
+              <a:t/>
             </a:r>
           </a:p>
           <a:p>
@@ -6621,7 +6621,7 @@
                 </a:solidFill>
                 <a:latin typeface="PT Sans"/>
               </a:rPr>
-              <a:t>2-класс ›</a:t>
+              <a:t/>
             </a:r>
           </a:p>
           <a:p>
@@ -8300,7 +8300,7 @@
                 </a:solidFill>
                 <a:latin typeface="PT Sans"/>
               </a:rPr>
-              <a:t>2-класс ›</a:t>
+              <a:t/>
             </a:r>
           </a:p>
           <a:p>
@@ -10994,7 +10994,7 @@
                 </a:solidFill>
                 <a:latin typeface="PT Sans"/>
               </a:rPr>
-              <a:t>2-класс ›</a:t>
+              <a:t/>
             </a:r>
           </a:p>
           <a:p>
@@ -12324,7 +12324,7 @@
                 </a:solidFill>
                 <a:latin typeface="PT Sans"/>
               </a:rPr>
-              <a:t>2-класс ›</a:t>
+              <a:t/>
             </a:r>
           </a:p>
           <a:p>
@@ -12997,7 +12997,7 @@
                 </a:solidFill>
                 <a:latin typeface="PT Sans"/>
               </a:rPr>
-              <a:t>2-класс ›</a:t>
+              <a:t/>
             </a:r>
           </a:p>
           <a:p>
@@ -13670,7 +13670,7 @@
                 </a:solidFill>
                 <a:latin typeface="PT Sans"/>
               </a:rPr>
-              <a:t>2-класс ›</a:t>
+              <a:t/>
             </a:r>
           </a:p>
           <a:p>
@@ -15219,7 +15219,7 @@
                 </a:solidFill>
                 <a:latin typeface="PT Sans"/>
               </a:rPr>
-              <a:t>2-класс ›</a:t>
+              <a:t/>
             </a:r>
           </a:p>
           <a:p>
@@ -16303,7 +16303,7 @@
                 </a:solidFill>
                 <a:latin typeface="PT Sans"/>
               </a:rPr>
-              <a:t>2-класс ›</a:t>
+              <a:t/>
             </a:r>
           </a:p>
           <a:p>
@@ -17833,7 +17833,7 @@
                 </a:solidFill>
                 <a:latin typeface="PT Sans"/>
               </a:rPr>
-              <a:t>2-класс ›</a:t>
+              <a:t/>
             </a:r>
           </a:p>
           <a:p>
@@ -19626,7 +19626,7 @@
                 </a:solidFill>
                 <a:latin typeface="PT Sans"/>
               </a:rPr>
-              <a:t>2-класс ›</a:t>
+              <a:t/>
             </a:r>
           </a:p>
           <a:p>
@@ -20903,7 +20903,7 @@
                 </a:solidFill>
                 <a:latin typeface="PT Sans"/>
               </a:rPr>
-              <a:t>2-класс ›</a:t>
+              <a:t/>
             </a:r>
           </a:p>
           <a:p>
@@ -22331,7 +22331,7 @@
                 </a:solidFill>
                 <a:latin typeface="PT Sans"/>
               </a:rPr>
-              <a:t>2-класс ›</a:t>
+              <a:t/>
             </a:r>
           </a:p>
           <a:p>
@@ -23787,7 +23787,7 @@
                 </a:solidFill>
                 <a:latin typeface="PT Sans"/>
               </a:rPr>
-              <a:t>2-класс ›</a:t>
+              <a:t/>
             </a:r>
           </a:p>
           <a:p>
@@ -24943,7 +24943,7 @@
                 </a:solidFill>
                 <a:latin typeface="PT Sans"/>
               </a:rPr>
-              <a:t>2-класс ›</a:t>
+              <a:t/>
             </a:r>
           </a:p>
           <a:p>
@@ -25743,7 +25743,7 @@
                 </a:solidFill>
                 <a:latin typeface="PT Sans"/>
               </a:rPr>
-              <a:t>2-класс ›</a:t>
+              <a:t/>
             </a:r>
           </a:p>
           <a:p>
@@ -26584,7 +26584,7 @@
                 </a:solidFill>
                 <a:latin typeface="PT Sans"/>
               </a:rPr>
-              <a:t>2-класс ›</a:t>
+              <a:t/>
             </a:r>
           </a:p>
           <a:p>
@@ -27533,7 +27533,7 @@
                 </a:solidFill>
                 <a:latin typeface="PT Sans"/>
               </a:rPr>
-              <a:t>2-класс ›</a:t>
+              <a:t/>
             </a:r>
           </a:p>
           <a:p>
@@ -28987,7 +28987,7 @@
                 </a:solidFill>
                 <a:latin typeface="PT Sans"/>
               </a:rPr>
-              <a:t>2-класс ›</a:t>
+              <a:t/>
             </a:r>
           </a:p>
           <a:p>
@@ -29733,7 +29733,7 @@
                 </a:solidFill>
                 <a:latin typeface="PT Sans"/>
               </a:rPr>
-              <a:t>2-класс ›</a:t>
+              <a:t/>
             </a:r>
           </a:p>
           <a:p>
@@ -30541,7 +30541,7 @@
                 </a:solidFill>
                 <a:latin typeface="PT Sans"/>
               </a:rPr>
-              <a:t>2-класс ›</a:t>
+              <a:t/>
             </a:r>
           </a:p>
           <a:p>
@@ -31732,7 +31732,7 @@
                 </a:solidFill>
                 <a:latin typeface="PT Sans"/>
               </a:rPr>
-              <a:t>2-класс ›</a:t>
+              <a:t/>
             </a:r>
           </a:p>
           <a:p>
@@ -32911,7 +32911,7 @@
                 </a:solidFill>
                 <a:latin typeface="PT Sans"/>
               </a:rPr>
-              <a:t>2-класс ›</a:t>
+              <a:t/>
             </a:r>
           </a:p>
           <a:p>
@@ -33092,7 +33092,7 @@
                 </a:solidFill>
                 <a:latin typeface="PT Sans"/>
               </a:rPr>
-              <a:t>1-класс</a:t>
+              <a:t/>
             </a:r>
           </a:p>
         </p:txBody>
@@ -33272,7 +33272,7 @@
                 </a:solidFill>
                 <a:latin typeface="PT Sans"/>
               </a:rPr>
-              <a:t>2-класс</a:t>
+              <a:t/>
             </a:r>
           </a:p>
         </p:txBody>
@@ -33508,7 +33508,7 @@
                 </a:solidFill>
                 <a:latin typeface="PT Sans"/>
               </a:rPr>
-              <a:t>3-класс</a:t>
+              <a:t/>
             </a:r>
           </a:p>
         </p:txBody>
@@ -33689,7 +33689,7 @@
                 </a:solidFill>
                 <a:latin typeface="PT Sans"/>
               </a:rPr>
-              <a:t>4-класс</a:t>
+              <a:t/>
             </a:r>
           </a:p>
         </p:txBody>
@@ -34090,7 +34090,7 @@
                 </a:solidFill>
                 <a:latin typeface="PT Sans"/>
               </a:rPr>
-              <a:t>2-класс ›</a:t>
+              <a:t/>
             </a:r>
           </a:p>
           <a:p>
@@ -35238,7 +35238,7 @@
                 </a:solidFill>
                 <a:latin typeface="PT Sans"/>
               </a:rPr>
-              <a:t>2-класс ›</a:t>
+              <a:t/>
             </a:r>
           </a:p>
           <a:p>

--- a/apps/resources/bundled_files/2-klass-kobeytuu-2-3-4-sabak.pptx
+++ b/apps/resources/bundled_files/2-klass-kobeytuu-2-3-4-sabak.pptx
@@ -1582,7 +1582,7 @@
           <a:lstStyle/>
           <a:p>
             <a:r>
-              <a:t>Ой жүгүртүү маданияты (Wenxi Lee, 2.6).</a:t>
+              <a:t>Ой жүгүртүү маданияты (Wenxi Lee, 2,6).</a:t>
             </a:r>
           </a:p>
         </p:txBody>
